--- a/public/plans/2026-05-11.pptx
+++ b/public/plans/2026-05-11.pptx
@@ -9440,7 +9440,7 @@
                 </a:solidFill>
                 <a:latin typeface="Calibri"/>
               </a:rPr>
-              <a:t>Ages 3–5  ·  45 minute session</a:t>
+              <a:t>Ages 3–5 · 45 minute session</a:t>
             </a:r>
           </a:p>
         </p:txBody>
@@ -9657,7 +9657,7 @@
                 </a:solidFill>
                 <a:latin typeface="Calibri"/>
               </a:rPr>
-              <a:t>COACH PLAYBOOK · PRE-K &amp; K</a:t>
+              <a:t>COACH PLAYBOOK · PRE-K &amp; KINDERGARTEN</a:t>
             </a:r>
           </a:p>
         </p:txBody>
@@ -12599,7 +12599,7 @@
                 </a:solidFill>
                 <a:latin typeface="Calibri"/>
               </a:rPr>
-              <a:t>qmtk Soccer · Coach Playbook · Pre-K &amp; K</a:t>
+              <a:t>qmtk Soccer · Coach Playbook · Pre-K &amp; Kindergarten</a:t>
             </a:r>
           </a:p>
         </p:txBody>
@@ -12816,7 +12816,7 @@
                 </a:solidFill>
                 <a:latin typeface="Calibri"/>
               </a:rPr>
-              <a:t>COACH PLAYBOOK · PRE-K &amp; K</a:t>
+              <a:t>COACH PLAYBOOK · PRE-K &amp; KINDERGARTEN</a:t>
             </a:r>
           </a:p>
         </p:txBody>
@@ -14717,7 +14717,7 @@
                 </a:solidFill>
                 <a:latin typeface="Calibri"/>
               </a:rPr>
-              <a:t>qmtk Soccer · Coach Playbook · Pre-K &amp; K</a:t>
+              <a:t>qmtk Soccer · Coach Playbook · Pre-K &amp; Kindergarten</a:t>
             </a:r>
           </a:p>
         </p:txBody>
@@ -14934,7 +14934,7 @@
                 </a:solidFill>
                 <a:latin typeface="Calibri"/>
               </a:rPr>
-              <a:t>COACH PLAYBOOK · PRE-K &amp; K</a:t>
+              <a:t>COACH PLAYBOOK · PRE-K &amp; KINDERGARTEN</a:t>
             </a:r>
           </a:p>
         </p:txBody>
@@ -16835,7 +16835,7 @@
                 </a:solidFill>
                 <a:latin typeface="Calibri"/>
               </a:rPr>
-              <a:t>qmtk Soccer · Coach Playbook · Pre-K &amp; K</a:t>
+              <a:t>qmtk Soccer · Coach Playbook · Pre-K &amp; Kindergarten</a:t>
             </a:r>
           </a:p>
         </p:txBody>
@@ -17052,7 +17052,7 @@
                 </a:solidFill>
                 <a:latin typeface="Calibri"/>
               </a:rPr>
-              <a:t>COACH PLAYBOOK · PRE-K &amp; K</a:t>
+              <a:t>COACH PLAYBOOK · PRE-K &amp; KINDERGARTEN</a:t>
             </a:r>
           </a:p>
         </p:txBody>
@@ -19447,7 +19447,7 @@
                 </a:solidFill>
                 <a:latin typeface="Calibri"/>
               </a:rPr>
-              <a:t>qmtk Soccer · Coach Playbook · Pre-K &amp; K</a:t>
+              <a:t>qmtk Soccer · Coach Playbook · Pre-K &amp; Kindergarten</a:t>
             </a:r>
           </a:p>
         </p:txBody>
@@ -19777,7 +19777,7 @@
                 </a:solidFill>
                 <a:latin typeface="Calibri"/>
               </a:rPr>
-              <a:t>Ages 6–11  ·  60 minute session</a:t>
+              <a:t>Ages 6–11 · 60 minute session</a:t>
             </a:r>
           </a:p>
         </p:txBody>
